--- a/docs/dogfood/nodeslide-domain-v1/nodeslide-golden.pptx
+++ b/docs/dogfood/nodeslide-domain-v1/nodeslide-golden.pptx
@@ -111,6 +111,250 @@
     </a:lvl9pPr>
   </p:defaultTextStyle>
 </p:presentation>
+</file>
+
+<file path=ppt/charts/chart1.xml><?xml version="1.0" encoding="utf-8"?>
+<c:chartSpace xmlns:c="http://schemas.openxmlformats.org/drawingml/2006/chart" xmlns:a="http://schemas.openxmlformats.org/drawingml/2006/main" xmlns:r="http://schemas.openxmlformats.org/officeDocument/2006/relationships">
+  <c:date1904 val="0"/>
+  <c:roundedCorners val="1"/>
+  <c:chart>
+    <c:autoTitleDeleted val="1"/>
+    <c:plotArea>
+      <c:layout/>
+      <c:barChart>
+        <c:barDir val="col"/>
+        <c:grouping val="clustered"/>
+        <c:varyColors val="0"/>
+        <c:ser>
+          <c:idx val="0"/>
+          <c:order val="0"/>
+          <c:tx>
+            <c:strRef>
+              <c:f>Sheet1!$B$1</c:f>
+              <c:strCache>
+                <c:ptCount val="1"/>
+                <c:pt idx="0">
+                  <c:v>Signal</c:v>
+                </c:pt>
+              </c:strCache>
+            </c:strRef>
+          </c:tx>
+          <c:spPr>
+            <a:solidFill>
+              <a:srgbClr val="B44A2D"/>
+            </a:solidFill>
+            <a:effectLst/>
+          </c:spPr>
+          <c:invertIfNegative val="0"/>
+          <c:dLbls>
+            <c:numFmt formatCode="#,##0" sourceLinked="0"/>
+            <c:txPr>
+              <a:bodyPr/>
+              <a:lstStyle/>
+              <a:p>
+                <a:pPr>
+                  <a:defRPr b="0" i="0" strike="noStrike" sz="1200" u="none">
+                    <a:solidFill>
+                      <a:srgbClr val="000000"/>
+                    </a:solidFill>
+                    <a:latin typeface="Arial"/>
+                  </a:defRPr>
+                </a:pPr>
+              </a:p>
+            </c:txPr>
+            <c:showLegendKey val="0"/>
+            <c:showVal val="0"/>
+            <c:showCatName val="0"/>
+            <c:showSerName val="0"/>
+            <c:showPercent val="0"/>
+            <c:showBubbleSize val="0"/>
+            <c:showLeaderLines val="0"/>
+          </c:dLbls>
+          <c:cat>
+            <c:multiLvlStrRef>
+              <c:f>Sheet1!$A$2:$A$4</c:f>
+              <c:multiLvlStrCache>
+                <c:ptCount val="3"/>
+                <c:lvl>
+                  <c:pt idx="0">
+                    <c:v>ok</c:v>
+                  </c:pt>
+                  <c:pt idx="1">
+                    <c:v>publish</c:v>
+                  </c:pt>
+                  <c:pt idx="2">
+                    <c:v>clean</c:v>
+                  </c:pt>
+                </c:lvl>
+              </c:multiLvlStrCache>
+            </c:multiLvlStrRef>
+          </c:cat>
+          <c:val>
+            <c:numRef>
+              <c:f>Sheet1!$B$2:$B$4</c:f>
+              <c:numCache>
+                <c:formatCode>General</c:formatCode>
+                <c:ptCount val="3"/>
+                <c:pt idx="0">
+                  <c:v>1</c:v>
+                </c:pt>
+                <c:pt idx="1">
+                  <c:v>1</c:v>
+                </c:pt>
+                <c:pt idx="2">
+                  <c:v>1</c:v>
+                </c:pt>
+              </c:numCache>
+            </c:numRef>
+          </c:val>
+        </c:ser>
+        <c:dLbls>
+          <c:numFmt formatCode="#,##0" sourceLinked="0"/>
+          <c:txPr>
+            <a:bodyPr/>
+            <a:lstStyle/>
+            <a:p>
+              <a:pPr>
+                <a:defRPr b="0" i="0" strike="noStrike" sz="1200" u="none">
+                  <a:solidFill>
+                    <a:srgbClr val="000000"/>
+                  </a:solidFill>
+                  <a:latin typeface="Arial"/>
+                </a:defRPr>
+              </a:pPr>
+            </a:p>
+          </c:txPr>
+          <c:showLegendKey val="0"/>
+          <c:showVal val="0"/>
+          <c:showCatName val="0"/>
+          <c:showSerName val="0"/>
+          <c:showPercent val="0"/>
+          <c:showBubbleSize val="0"/>
+          <c:showLeaderLines val="0"/>
+        </c:dLbls>
+        <c:gapWidth val="150"/>
+        <c:overlap val="0"/>
+        <c:axId val="2094734554"/>
+        <c:axId val="2094734552"/>
+        <c:axId val="2094734556"/>
+      </c:barChart>
+      <c:catAx>
+        <c:axId val="2094734554"/>
+        <c:scaling>
+          <c:orientation val="minMax"/>
+        </c:scaling>
+        <c:delete val="0"/>
+        <c:axPos val="b"/>
+        <c:numFmt formatCode="General" sourceLinked="1"/>
+        <c:majorTickMark val="out"/>
+        <c:minorTickMark val="none"/>
+        <c:tickLblPos val="low"/>
+        <c:spPr>
+          <a:ln w="12700" cap="flat">
+            <a:solidFill>
+              <a:srgbClr val="888888"/>
+            </a:solidFill>
+            <a:prstDash val="solid"/>
+            <a:round/>
+          </a:ln>
+        </c:spPr>
+        <c:txPr>
+          <a:bodyPr/>
+          <a:lstStyle/>
+          <a:p>
+            <a:pPr>
+              <a:defRPr sz="1000" b="0" i="0" u="none" strike="noStrike">
+                <a:solidFill>
+                  <a:srgbClr val="756B61"/>
+                </a:solidFill>
+                <a:latin typeface="JetBrains Mono Variable"/>
+              </a:defRPr>
+            </a:pPr>
+            <a:endParaRPr lang="en-US"/>
+          </a:p>
+        </c:txPr>
+        <c:crossAx val="2094734552"/>
+        <c:crosses val="autoZero"/>
+        <c:auto val="1"/>
+        <c:lblAlgn val="ctr"/>
+        <c:noMultiLvlLbl val="1"/>
+      </c:catAx>
+      <c:valAx>
+        <c:axId val="2094734552"/>
+        <c:scaling>
+          <c:orientation val="minMax"/>
+        </c:scaling>
+        <c:delete val="0"/>
+        <c:axPos val="l"/>
+        <c:majorGridlines>
+          <c:spPr>
+            <a:ln w="12700" cap="flat">
+              <a:solidFill>
+                <a:srgbClr val="888888"/>
+              </a:solidFill>
+              <a:prstDash val="solid"/>
+              <a:round/>
+            </a:ln>
+          </c:spPr>
+        </c:majorGridlines>
+        <c:numFmt formatCode="General" sourceLinked="0"/>
+        <c:majorTickMark val="out"/>
+        <c:minorTickMark val="none"/>
+        <c:tickLblPos val="nextTo"/>
+        <c:spPr>
+          <a:ln w="12700" cap="flat">
+            <a:solidFill>
+              <a:srgbClr val="888888"/>
+            </a:solidFill>
+            <a:prstDash val="solid"/>
+            <a:round/>
+          </a:ln>
+        </c:spPr>
+        <c:txPr>
+          <a:bodyPr/>
+          <a:lstStyle/>
+          <a:p>
+            <a:pPr>
+              <a:defRPr sz="1000" b="0" i="0" u="none" strike="noStrike">
+                <a:solidFill>
+                  <a:srgbClr val="756B61"/>
+                </a:solidFill>
+                <a:latin typeface="JetBrains Mono Variable"/>
+              </a:defRPr>
+            </a:pPr>
+            <a:endParaRPr lang="en-US"/>
+          </a:p>
+        </c:txPr>
+        <c:crossAx val="2094734554"/>
+        <c:crosses val="autoZero"/>
+        <c:crossBetween val="between"/>
+      </c:valAx>
+      <c:spPr>
+        <a:noFill/>
+        <a:ln>
+          <a:noFill/>
+        </a:ln>
+        <a:effectLst/>
+      </c:spPr>
+    </c:plotArea>
+    <c:plotVisOnly val="1"/>
+    <c:dispBlanksAs val="span"/>
+  </c:chart>
+  <c:spPr>
+    <a:solidFill>
+      <a:srgbClr val="F2DED3">
+        <a:alpha val="0"/>
+      </a:srgbClr>
+    </a:solidFill>
+    <a:ln>
+      <a:noFill/>
+    </a:ln>
+    <a:effectLst/>
+  </c:spPr>
+  <c:externalData r:id="rId1">
+    <c:autoUpdate val="0"/>
+  </c:externalData>
+</c:chartSpace>
 </file>
 
 <file path=ppt/notesMasters/notesMaster1.xml><?xml version="1.0" encoding="utf-8"?>
@@ -511,7 +755,7 @@
               <a:t>Narrative role: NodeSlide / 01. Keep the spoken transition focused on “Build the story. Keep every decision editable.”
 Evidence note: Content is based on the supplied creation brief. Illustrative examples are not independently verified; replace them with measured evidence before external publication.
 NodeSlide sources
-[source_fe3f18f3463dcd91585199a0d62f9eff] NodeSlide product brief
+[source_eb6f482081316bbfef1b23151b379cc3] NodeSlide product brief
 Citation: Show how NodeSlide turns presentation work into a traceable, editable, reviewable system.
 Disclaimer: Internal working material</a:t>
             </a:r>
@@ -604,10 +848,10 @@
               <a:t>Narrative role: Scenario / 02. Keep the spoken transition focused on “Keep source context attached as the story moves.”
 Evidence note: Content is based on the supplied creation brief. Illustrative examples are not independently verified; replace them with measured evidence before external publication.
 NodeSlide sources
-[source_fe3f18f3463dcd91585199a0d62f9eff] NodeSlide product brief
+[source_eb6f482081316bbfef1b23151b379cc3] NodeSlide product brief
 Citation: Show how NodeSlide turns presentation work into a traceable, editable, reviewable system.
 Disclaimer: Internal working material
-[source_cdf31d0bdc30c453c8c14d285e0f87bf] Golden workflow scenario
+[source_9166291db29d5f29909e29a0d8103ecb] Golden workflow scenario
 Citation: Qualitative product-workflow scenario for demonstrating NodeSlide; no measured customer benchmark is claimed.
 Disclaimer: Internal working material</a:t>
             </a:r>
@@ -700,8 +944,11 @@
               <a:t>Narrative role: Foundation / 03. Keep the spoken transition focused on “Structure turns a visual artifact into an operating surface.”
 Evidence note: Content is based on the supplied creation brief. Illustrative examples are not independently verified; replace them with measured evidence before external publication.
 NodeSlide sources
-[source_fe3f18f3463dcd91585199a0d62f9eff] NodeSlide product brief
+[source_eb6f482081316bbfef1b23151b379cc3] NodeSlide product brief
 Citation: Show how NodeSlide turns presentation work into a traceable, editable, reviewable system.
+Disclaimer: Internal working material
+[source_9166291db29d5f29909e29a0d8103ecb] Golden workflow scenario
+Citation: Qualitative product-workflow scenario for demonstrating NodeSlide; no measured customer benchmark is claimed.
 Disclaimer: Internal working material</a:t>
             </a:r>
             <a:endParaRPr lang="en-US" dirty="0"/>
@@ -793,8 +1040,11 @@
               <a:t>Narrative role: Workflow / 04. Keep the spoken transition focused on “Plan → propose → commit, with scope checked at every boundary.”
 Evidence note: Content is based on the supplied creation brief. Illustrative examples are not independently verified; replace them with measured evidence before external publication.
 NodeSlide sources
-[source_fe3f18f3463dcd91585199a0d62f9eff] NodeSlide product brief
+[source_eb6f482081316bbfef1b23151b379cc3] NodeSlide product brief
 Citation: Show how NodeSlide turns presentation work into a traceable, editable, reviewable system.
+Disclaimer: Internal working material
+[source_9166291db29d5f29909e29a0d8103ecb] Golden workflow scenario
+Citation: Qualitative product-workflow scenario for demonstrating NodeSlide; no measured customer benchmark is claimed.
 Disclaimer: Internal working material</a:t>
             </a:r>
             <a:endParaRPr lang="en-US" dirty="0"/>
@@ -886,10 +1136,10 @@
               <a:t>Narrative role: Proof / 05. Keep the spoken transition focused on “A beautiful deck still needs deterministic gates.”
 Evidence note: Content is based on the supplied creation brief. Illustrative examples are not independently verified; replace them with measured evidence before external publication.
 NodeSlide sources
-[source_fe3f18f3463dcd91585199a0d62f9eff] NodeSlide product brief
+[source_eb6f482081316bbfef1b23151b379cc3] NodeSlide product brief
 Citation: Show how NodeSlide turns presentation work into a traceable, editable, reviewable system.
 Disclaimer: Internal working material
-[source_cdf31d0bdc30c453c8c14d285e0f87bf] Golden workflow scenario
+[source_9166291db29d5f29909e29a0d8103ecb] Golden workflow scenario
 Citation: Qualitative product-workflow scenario for demonstrating NodeSlide; no measured customer benchmark is claimed.
 Disclaimer: Internal working material</a:t>
             </a:r>
@@ -982,7 +1232,7 @@
               <a:t>Narrative role: Trust / 06. Keep the spoken transition focused on “Comments become context. Patches remain choices.”
 Evidence note: Content is based on the supplied creation brief. Illustrative examples are not independently verified; replace them with measured evidence before external publication.
 NodeSlide sources
-[source_fe3f18f3463dcd91585199a0d62f9eff] NodeSlide product brief
+[source_eb6f482081316bbfef1b23151b379cc3] NodeSlide product brief
 Citation: Show how NodeSlide turns presentation work into a traceable, editable, reviewable system.
 Disclaimer: Internal working material</a:t>
             </a:r>
@@ -1075,7 +1325,7 @@
               <a:t>Narrative role: Next / 07. Keep the spoken transition focused on “Move at presentation speed without giving up engineering-grade trust.”
 Evidence note: Content is based on the supplied creation brief. Illustrative examples are not independently verified; replace them with measured evidence before external publication.
 NodeSlide sources
-[source_fe3f18f3463dcd91585199a0d62f9eff] NodeSlide product brief
+[source_eb6f482081316bbfef1b23151b379cc3] NodeSlide product brief
 Citation: Show how NodeSlide turns presentation work into a traceable, editable, reviewable system.
 Disclaimer: Internal working material</a:t>
             </a:r>
@@ -1452,7 +1702,36 @@
       </p:grpSpPr>
       <p:sp>
         <p:nvSpPr>
-          <p:cNvPr id="2" name="element_53b47f7716ac7ee776b60dc98b6c44a3"/>
+          <p:cNvPr id="2" name="nodeslide-slide-id:slide_54bb266d8b30ee96e3ba6d2bcec5a515"/>
+          <p:cNvSpPr/>
+          <p:nvPr/>
+        </p:nvSpPr>
+        <p:spPr>
+          <a:xfrm>
+            <a:off x="0" y="0"/>
+            <a:ext cx="914" cy="914"/>
+          </a:xfrm>
+          <a:prstGeom prst="rect">
+            <a:avLst/>
+          </a:prstGeom>
+          <a:solidFill>
+            <a:srgbClr val="FFFFFF">
+              <a:alpha val="0"/>
+            </a:srgbClr>
+          </a:solidFill>
+          <a:ln w="12700">
+            <a:solidFill>
+              <a:srgbClr val="FFFFFF">
+                <a:alpha val="0"/>
+              </a:srgbClr>
+            </a:solidFill>
+            <a:prstDash val="solid"/>
+          </a:ln>
+        </p:spPr>
+      </p:sp>
+      <p:sp>
+        <p:nvSpPr>
+          <p:cNvPr id="3" name="element_29e433d86cdb0e9ce35490d0b50f8b59"/>
           <p:cNvSpPr/>
           <p:nvPr/>
         </p:nvSpPr>
@@ -1479,7 +1758,7 @@
       </p:sp>
       <p:sp>
         <p:nvSpPr>
-          <p:cNvPr id="3" name="element_66e80d5e2b81ef916f8835f547d706d3"/>
+          <p:cNvPr id="4" name="element_329f443b6b0e9c7e218aca4c213e1e43"/>
           <p:cNvSpPr txBox="1"/>
           <p:nvPr/>
         </p:nvSpPr>
@@ -1523,7 +1802,7 @@
       </p:sp>
       <p:sp>
         <p:nvSpPr>
-          <p:cNvPr id="4" name="element_349c18e5b264cb65bae0730d88074d1c"/>
+          <p:cNvPr id="5" name="element_729da4302a801963eb9301d2ad4f45e5"/>
           <p:cNvSpPr txBox="1"/>
           <p:nvPr/>
         </p:nvSpPr>
@@ -1555,9 +1834,9 @@
                 <a:solidFill>
                   <a:srgbClr val="26221D"/>
                 </a:solidFill>
-                <a:latin typeface="Fraunces Variable" pitchFamily="34" charset="0"/>
-                <a:ea typeface="Fraunces Variable" pitchFamily="34" charset="-122"/>
-                <a:cs typeface="Fraunces Variable" pitchFamily="34" charset="-120"/>
+                <a:latin typeface="Georgia" pitchFamily="34" charset="0"/>
+                <a:ea typeface="Georgia" pitchFamily="34" charset="-122"/>
+                <a:cs typeface="Georgia" pitchFamily="34" charset="-120"/>
               </a:rPr>
               <a:t>Build the story. Keep every decision editable.</a:t>
             </a:r>
@@ -1567,7 +1846,7 @@
       </p:sp>
       <p:sp>
         <p:nvSpPr>
-          <p:cNvPr id="5" name="element_f7c0240db9c7ebd58b411e85a657754f"/>
+          <p:cNvPr id="6" name="element_5378b9d22985f6483da3089708242a12"/>
           <p:cNvSpPr txBox="1"/>
           <p:nvPr/>
         </p:nvSpPr>
@@ -1611,7 +1890,7 @@
       </p:sp>
       <p:sp>
         <p:nvSpPr>
-          <p:cNvPr id="6" name="element_d1bdecc8294567284b5905502c7a7c41"/>
+          <p:cNvPr id="7" name="element_2884836eae2b5ac0251ec315218a463c"/>
           <p:cNvSpPr txBox="1"/>
           <p:nvPr/>
         </p:nvSpPr>
@@ -1655,7 +1934,7 @@
       </p:sp>
       <p:sp>
         <p:nvSpPr>
-          <p:cNvPr id="7" name="element_2e4f2c69c89f5d8b8e430a46fb18de26"/>
+          <p:cNvPr id="8" name="element_e9e0ac3ae1103959ffb415d155ea2eac"/>
           <p:cNvSpPr txBox="1"/>
           <p:nvPr/>
         </p:nvSpPr>
@@ -1699,7 +1978,7 @@
       </p:sp>
       <p:sp>
         <p:nvSpPr>
-          <p:cNvPr id="8" name="element_71a52c1059eb45d6c2cdf88dc6fc4857"/>
+          <p:cNvPr id="9" name="element_d7e0c60767b9c77ca0490c8f2620f282"/>
           <p:cNvSpPr txBox="1"/>
           <p:nvPr/>
         </p:nvSpPr>
@@ -1743,7 +2022,7 @@
       </p:sp>
       <p:sp>
         <p:nvSpPr>
-          <p:cNvPr id="9" name="element_9aa0ef692abcc00b9331a3ead8fe1f7b"/>
+          <p:cNvPr id="10" name="element_afa1445e71343dc9874b4937b3e3f04d"/>
           <p:cNvSpPr txBox="1"/>
           <p:nvPr/>
         </p:nvSpPr>
@@ -1787,7 +2066,7 @@
       </p:sp>
       <p:sp>
         <p:nvSpPr>
-          <p:cNvPr id="10" name="element_d4b8594043f56a9be200a1b811f8d83d"/>
+          <p:cNvPr id="11" name="element_1531f5f2e586c0a414c730b88509866a"/>
           <p:cNvSpPr txBox="1"/>
           <p:nvPr/>
         </p:nvSpPr>
@@ -1863,7 +2142,36 @@
       </p:grpSpPr>
       <p:sp>
         <p:nvSpPr>
-          <p:cNvPr id="2" name="element_cbcc8de14cb7481c51229c1af336a05f"/>
+          <p:cNvPr id="2" name="nodeslide-slide-id:slide_1ff5bc5962780c010684138f496bb911"/>
+          <p:cNvSpPr/>
+          <p:nvPr/>
+        </p:nvSpPr>
+        <p:spPr>
+          <a:xfrm>
+            <a:off x="0" y="0"/>
+            <a:ext cx="914" cy="914"/>
+          </a:xfrm>
+          <a:prstGeom prst="rect">
+            <a:avLst/>
+          </a:prstGeom>
+          <a:solidFill>
+            <a:srgbClr val="FFFFFF">
+              <a:alpha val="0"/>
+            </a:srgbClr>
+          </a:solidFill>
+          <a:ln w="12700">
+            <a:solidFill>
+              <a:srgbClr val="FFFFFF">
+                <a:alpha val="0"/>
+              </a:srgbClr>
+            </a:solidFill>
+            <a:prstDash val="solid"/>
+          </a:ln>
+        </p:spPr>
+      </p:sp>
+      <p:sp>
+        <p:nvSpPr>
+          <p:cNvPr id="3" name="element_645cd07865401e6b76f306bcec00129d"/>
           <p:cNvSpPr/>
           <p:nvPr/>
         </p:nvSpPr>
@@ -1890,7 +2198,7 @@
       </p:sp>
       <p:sp>
         <p:nvSpPr>
-          <p:cNvPr id="3" name="element_832b2226326dc765766ed6882c405f61"/>
+          <p:cNvPr id="4" name="element_7ed444176f9e815ed519322d862db608"/>
           <p:cNvSpPr txBox="1"/>
           <p:nvPr/>
         </p:nvSpPr>
@@ -1934,7 +2242,7 @@
       </p:sp>
       <p:sp>
         <p:nvSpPr>
-          <p:cNvPr id="4" name="element_2a053b0990de5a774a4dba0578cda7da"/>
+          <p:cNvPr id="5" name="element_9795d8a1e172a4d994caf66d6414157c"/>
           <p:cNvSpPr txBox="1"/>
           <p:nvPr/>
         </p:nvSpPr>
@@ -1966,9 +2274,9 @@
                 <a:solidFill>
                   <a:srgbClr val="26221D"/>
                 </a:solidFill>
-                <a:latin typeface="Fraunces Variable" pitchFamily="34" charset="0"/>
-                <a:ea typeface="Fraunces Variable" pitchFamily="34" charset="-122"/>
-                <a:cs typeface="Fraunces Variable" pitchFamily="34" charset="-120"/>
+                <a:latin typeface="Georgia" pitchFamily="34" charset="0"/>
+                <a:ea typeface="Georgia" pitchFamily="34" charset="-122"/>
+                <a:cs typeface="Georgia" pitchFamily="34" charset="-120"/>
               </a:rPr>
               <a:t>Keep source context attached as the story moves.</a:t>
             </a:r>
@@ -1978,7 +2286,7 @@
       </p:sp>
       <p:sp>
         <p:nvSpPr>
-          <p:cNvPr id="5" name="element_40334008af738053147f12e7af8f088c"/>
+          <p:cNvPr id="6" name="element_87e833662e178b3d07ba67d4b0a24b34"/>
           <p:cNvSpPr txBox="1"/>
           <p:nvPr/>
         </p:nvSpPr>
@@ -2022,7 +2330,7 @@
       </p:sp>
       <p:sp>
         <p:nvSpPr>
-          <p:cNvPr id="6" name="element_4e167ccdb490292c7b0fba15a315ecef"/>
+          <p:cNvPr id="7" name="element_bc5a313065d2d1cd4941bd9b21d63e29"/>
           <p:cNvSpPr txBox="1"/>
           <p:nvPr/>
         </p:nvSpPr>
@@ -2066,13 +2374,13 @@
       </p:sp>
       <p:sp>
         <p:nvSpPr>
-          <p:cNvPr id="7" name="element_bd69d5283543b3fb21ae6483a302d4d7"/>
-          <p:cNvSpPr txBox="1"/>
-          <p:nvPr/>
-        </p:nvSpPr>
-        <p:spPr>
-          <a:xfrm>
-            <a:off x="853419" y="5074920"/>
+          <p:cNvPr id="8" name="element_5b6f9b1ff82fe76ce1880ac03ad1d8b6"/>
+          <p:cNvSpPr txBox="1"/>
+          <p:nvPr/>
+        </p:nvSpPr>
+        <p:spPr>
+          <a:xfrm>
+            <a:off x="853419" y="4937760"/>
             <a:ext cx="4754761" cy="617220"/>
           </a:xfrm>
           <a:prstGeom prst="rect">
@@ -2110,13 +2418,13 @@
       </p:sp>
       <p:sp>
         <p:nvSpPr>
-          <p:cNvPr id="8" name="element_c7fbd294d269b565c5f2bcae80df495b"/>
-          <p:cNvSpPr txBox="1"/>
-          <p:nvPr/>
-        </p:nvSpPr>
-        <p:spPr>
-          <a:xfrm>
-            <a:off x="853419" y="5897880"/>
+          <p:cNvPr id="9" name="element_204d9eb6a4b5ecad252613df93392f74"/>
+          <p:cNvSpPr txBox="1"/>
+          <p:nvPr/>
+        </p:nvSpPr>
+        <p:spPr>
+          <a:xfrm>
+            <a:off x="853419" y="5623560"/>
             <a:ext cx="4754761" cy="617220"/>
           </a:xfrm>
           <a:prstGeom prst="rect">
@@ -2154,14 +2462,14 @@
       </p:sp>
       <p:sp>
         <p:nvSpPr>
-          <p:cNvPr id="9" name="element_4d99e843358969f04da70874256da0b1"/>
+          <p:cNvPr id="10" name="element_ac604e6863af4935b0a3f88efd80001b"/>
           <p:cNvSpPr txBox="1"/>
           <p:nvPr/>
         </p:nvSpPr>
         <p:spPr>
           <a:xfrm>
             <a:off x="6827349" y="2811780"/>
-            <a:ext cx="4145176" cy="1028700"/>
+            <a:ext cx="4145176" cy="1371600"/>
           </a:xfrm>
           <a:prstGeom prst="rect">
             <a:avLst/>
@@ -2182,7 +2490,7 @@
               <a:buNone/>
             </a:pPr>
             <a:r>
-              <a:rPr lang="en-US" sz="4300" b="1" dirty="0">
+              <a:rPr lang="en-US" sz="5600" b="1" dirty="0">
                 <a:solidFill>
                   <a:srgbClr val="34452C"/>
                 </a:solidFill>
@@ -2192,19 +2500,19 @@
               </a:rPr>
               <a:t>CONTEXT</a:t>
             </a:r>
-            <a:endParaRPr lang="en-US" sz="4300" dirty="0"/>
-          </a:p>
-        </p:txBody>
-      </p:sp>
-      <p:sp>
-        <p:nvSpPr>
-          <p:cNvPr id="10" name="element_225bc32d00a91bbe4b5d246eb1aa26d1"/>
-          <p:cNvSpPr txBox="1"/>
-          <p:nvPr/>
-        </p:nvSpPr>
-        <p:spPr>
-          <a:xfrm>
-            <a:off x="7193100" y="3977640"/>
+            <a:endParaRPr lang="en-US" sz="5600" dirty="0"/>
+          </a:p>
+        </p:txBody>
+      </p:sp>
+      <p:sp>
+        <p:nvSpPr>
+          <p:cNvPr id="11" name="element_b4d2b98aa26e96a037fce9328bce0d18"/>
+          <p:cNvSpPr txBox="1"/>
+          <p:nvPr/>
+        </p:nvSpPr>
+        <p:spPr>
+          <a:xfrm>
+            <a:off x="7193100" y="4320540"/>
             <a:ext cx="3535592" cy="617220"/>
           </a:xfrm>
           <a:prstGeom prst="rect">
@@ -2242,7 +2550,7 @@
       </p:sp>
       <p:sp>
         <p:nvSpPr>
-          <p:cNvPr id="11" name="element_c13faa5abad08aecc5282aed3dc1f672"/>
+          <p:cNvPr id="12" name="element_ff0f88e8dfe00998d57c20769a9e3905"/>
           <p:cNvSpPr txBox="1"/>
           <p:nvPr/>
         </p:nvSpPr>
@@ -2286,7 +2594,7 @@
       </p:sp>
       <p:sp>
         <p:nvSpPr>
-          <p:cNvPr id="12" name="element_7d3cbd704f6c42e0ec9efe2f5cb50a8a"/>
+          <p:cNvPr id="13" name="element_92b52970cb49ed12fb665ed2a5c5e1d7"/>
           <p:cNvSpPr txBox="1"/>
           <p:nvPr/>
         </p:nvSpPr>
@@ -2362,7 +2670,36 @@
       </p:grpSpPr>
       <p:sp>
         <p:nvSpPr>
-          <p:cNvPr id="2" name="element_3647a6b20b587bdbb12ae59305dee26b"/>
+          <p:cNvPr id="2" name="nodeslide-slide-id:slide_35013980cdf574ef9a3945e3362f5e52"/>
+          <p:cNvSpPr/>
+          <p:nvPr/>
+        </p:nvSpPr>
+        <p:spPr>
+          <a:xfrm>
+            <a:off x="0" y="0"/>
+            <a:ext cx="914" cy="914"/>
+          </a:xfrm>
+          <a:prstGeom prst="rect">
+            <a:avLst/>
+          </a:prstGeom>
+          <a:solidFill>
+            <a:srgbClr val="FFFFFF">
+              <a:alpha val="0"/>
+            </a:srgbClr>
+          </a:solidFill>
+          <a:ln w="12700">
+            <a:solidFill>
+              <a:srgbClr val="FFFFFF">
+                <a:alpha val="0"/>
+              </a:srgbClr>
+            </a:solidFill>
+            <a:prstDash val="solid"/>
+          </a:ln>
+        </p:spPr>
+      </p:sp>
+      <p:sp>
+        <p:nvSpPr>
+          <p:cNvPr id="3" name="element_85c22ac303bac62375235a1949d7c7fe"/>
           <p:cNvSpPr/>
           <p:nvPr/>
         </p:nvSpPr>
@@ -2389,7 +2726,7 @@
       </p:sp>
       <p:sp>
         <p:nvSpPr>
-          <p:cNvPr id="3" name="element_43fd065848fe8d854b5a4ae14bcf6686"/>
+          <p:cNvPr id="4" name="element_904710a9932fd0d294aa8f0d280c472f"/>
           <p:cNvSpPr txBox="1"/>
           <p:nvPr/>
         </p:nvSpPr>
@@ -2433,7 +2770,7 @@
       </p:sp>
       <p:sp>
         <p:nvSpPr>
-          <p:cNvPr id="4" name="element_6d402bdba9ed12a19bd42efc3fc9bd1e"/>
+          <p:cNvPr id="5" name="element_f0b0753148f984f26bf2ac40f5126baa"/>
           <p:cNvSpPr txBox="1"/>
           <p:nvPr/>
         </p:nvSpPr>
@@ -2465,9 +2802,9 @@
                 <a:solidFill>
                   <a:srgbClr val="26221D"/>
                 </a:solidFill>
-                <a:latin typeface="Fraunces Variable" pitchFamily="34" charset="0"/>
-                <a:ea typeface="Fraunces Variable" pitchFamily="34" charset="-122"/>
-                <a:cs typeface="Fraunces Variable" pitchFamily="34" charset="-120"/>
+                <a:latin typeface="Georgia" pitchFamily="34" charset="0"/>
+                <a:ea typeface="Georgia" pitchFamily="34" charset="-122"/>
+                <a:cs typeface="Georgia" pitchFamily="34" charset="-120"/>
               </a:rPr>
               <a:t>Structure turns a visual artifact into an operating surface.</a:t>
             </a:r>
@@ -2477,14 +2814,14 @@
       </p:sp>
       <p:sp>
         <p:nvSpPr>
-          <p:cNvPr id="5" name="element_db2264064c280e50d2eb7751d12ad471"/>
+          <p:cNvPr id="6" name="element_fa7ed116f5f52f8b3cf54be8d874c731"/>
           <p:cNvSpPr txBox="1"/>
           <p:nvPr/>
         </p:nvSpPr>
         <p:spPr>
           <a:xfrm>
             <a:off x="853419" y="2743200"/>
-            <a:ext cx="5852014" cy="1371600"/>
+            <a:ext cx="4754761" cy="1371600"/>
           </a:xfrm>
           <a:prstGeom prst="rect">
             <a:avLst/>
@@ -2521,14 +2858,14 @@
       </p:sp>
       <p:sp>
         <p:nvSpPr>
-          <p:cNvPr id="6" name="element_2a2624b7e1e658b405bc07bb10b5cee3"/>
-          <p:cNvSpPr txBox="1"/>
-          <p:nvPr/>
-        </p:nvSpPr>
-        <p:spPr>
-          <a:xfrm>
-            <a:off x="7193100" y="2880360"/>
-            <a:ext cx="4023259" cy="617220"/>
+          <p:cNvPr id="7" name="element_17153d78dfa9bc302f4e6be00e94a763"/>
+          <p:cNvSpPr txBox="1"/>
+          <p:nvPr/>
+        </p:nvSpPr>
+        <p:spPr>
+          <a:xfrm>
+            <a:off x="853419" y="4251960"/>
+            <a:ext cx="4754761" cy="617220"/>
           </a:xfrm>
           <a:prstGeom prst="rect">
             <a:avLst/>
@@ -2565,14 +2902,14 @@
       </p:sp>
       <p:sp>
         <p:nvSpPr>
-          <p:cNvPr id="7" name="element_bd7374a44f1ec979fdd8f069c158da7c"/>
-          <p:cNvSpPr txBox="1"/>
-          <p:nvPr/>
-        </p:nvSpPr>
-        <p:spPr>
-          <a:xfrm>
-            <a:off x="7193100" y="3703320"/>
-            <a:ext cx="4023259" cy="617220"/>
+          <p:cNvPr id="8" name="element_a083b6194447f47851270c927eed1524"/>
+          <p:cNvSpPr txBox="1"/>
+          <p:nvPr/>
+        </p:nvSpPr>
+        <p:spPr>
+          <a:xfrm>
+            <a:off x="853419" y="4937760"/>
+            <a:ext cx="4754761" cy="617220"/>
           </a:xfrm>
           <a:prstGeom prst="rect">
             <a:avLst/>
@@ -2609,14 +2946,14 @@
       </p:sp>
       <p:sp>
         <p:nvSpPr>
-          <p:cNvPr id="8" name="element_0d534e0069da27efafdd1bf9b5430ca4"/>
-          <p:cNvSpPr txBox="1"/>
-          <p:nvPr/>
-        </p:nvSpPr>
-        <p:spPr>
-          <a:xfrm>
-            <a:off x="7193100" y="4526280"/>
-            <a:ext cx="4023259" cy="617220"/>
+          <p:cNvPr id="9" name="element_76cd7a0d6f1556c8341e15b80f4de6d8"/>
+          <p:cNvSpPr txBox="1"/>
+          <p:nvPr/>
+        </p:nvSpPr>
+        <p:spPr>
+          <a:xfrm>
+            <a:off x="853419" y="5623560"/>
+            <a:ext cx="4754761" cy="617220"/>
           </a:xfrm>
           <a:prstGeom prst="rect">
             <a:avLst/>
@@ -2653,7 +2990,151 @@
       </p:sp>
       <p:sp>
         <p:nvSpPr>
-          <p:cNvPr id="9" name="element_fc8710ce90ca0f1dec56695b94ce2d21"/>
+          <p:cNvPr id="10" name="element_5e52a380e5e2b6c8aaf0c2aab12525ba:fallback-shape"/>
+          <p:cNvSpPr/>
+          <p:nvPr/>
+        </p:nvSpPr>
+        <p:spPr>
+          <a:xfrm>
+            <a:off x="6461598" y="2674620"/>
+            <a:ext cx="4754761" cy="2606040"/>
+          </a:xfrm>
+          <a:prstGeom prst="roundRect">
+            <a:avLst/>
+          </a:prstGeom>
+          <a:solidFill>
+            <a:srgbClr val="F2DED3"/>
+          </a:solidFill>
+          <a:ln w="19050">
+            <a:solidFill>
+              <a:srgbClr val="DED7CC"/>
+            </a:solidFill>
+            <a:prstDash val="dash"/>
+          </a:ln>
+        </p:spPr>
+      </p:sp>
+      <p:sp>
+        <p:nvSpPr>
+          <p:cNvPr id="11" name="element_5e52a380e5e2b6c8aaf0c2aab12525ba:fallback-label"/>
+          <p:cNvSpPr/>
+          <p:nvPr/>
+        </p:nvSpPr>
+        <p:spPr>
+          <a:xfrm>
+            <a:off x="6461598" y="2674620"/>
+            <a:ext cx="4754761" cy="2606040"/>
+          </a:xfrm>
+          <a:prstGeom prst="rect">
+            <a:avLst/>
+          </a:prstGeom>
+          <a:noFill/>
+          <a:ln/>
+        </p:spPr>
+        <p:txBody>
+          <a:bodyPr wrap="square" lIns="101600" tIns="101600" rIns="101600" bIns="101600" rtlCol="0" anchor="ctr">
+            <a:normAutofit/>
+          </a:bodyPr>
+          <a:lstStyle/>
+          <a:p>
+            <a:pPr algn="ctr" indent="0" marL="0">
+              <a:buNone/>
+            </a:pPr>
+            <a:r>
+              <a:rPr lang="en-US" sz="1400" dirty="0">
+                <a:solidFill>
+                  <a:srgbClr val="756B61"/>
+                </a:solidFill>
+                <a:latin typeface="Geist Variable" pitchFamily="34" charset="0"/>
+                <a:ea typeface="Geist Variable" pitchFamily="34" charset="-122"/>
+                <a:cs typeface="Geist Variable" pitchFamily="34" charset="-120"/>
+              </a:rPr>
+              <a:t>Structured deck graph connecting slides, elements, sources, and versions</a:t>
+            </a:r>
+            <a:endParaRPr lang="en-US" sz="1400" dirty="0"/>
+          </a:p>
+          <a:p>
+            <a:pPr algn="ctr" indent="0" marL="0">
+              <a:buNone/>
+            </a:pPr>
+            <a:r>
+              <a:rPr lang="en-US" sz="1400" dirty="0">
+                <a:solidFill>
+                  <a:srgbClr val="756B61"/>
+                </a:solidFill>
+                <a:latin typeface="Geist Variable" pitchFamily="34" charset="0"/>
+                <a:ea typeface="Geist Variable" pitchFamily="34" charset="-122"/>
+                <a:cs typeface="Geist Variable" pitchFamily="34" charset="-120"/>
+              </a:rPr>
+              <a:t>Replace image</a:t>
+            </a:r>
+            <a:endParaRPr lang="en-US" sz="1400" dirty="0"/>
+          </a:p>
+          <a:p>
+            <a:pPr algn="ctr" indent="0" marL="0">
+              <a:buNone/>
+            </a:pPr>
+            <a:r>
+              <a:rPr lang="en-US" sz="1400" dirty="0">
+                <a:solidFill>
+                  <a:srgbClr val="756B61"/>
+                </a:solidFill>
+                <a:latin typeface="Geist Variable" pitchFamily="34" charset="0"/>
+                <a:ea typeface="Geist Variable" pitchFamily="34" charset="-122"/>
+                <a:cs typeface="Geist Variable" pitchFamily="34" charset="-120"/>
+              </a:rPr>
+              <a:t>A canonical deck graph keeps every artifact connected.</a:t>
+            </a:r>
+            <a:endParaRPr lang="en-US" sz="1400" dirty="0"/>
+          </a:p>
+        </p:txBody>
+      </p:sp>
+      <p:sp>
+        <p:nvSpPr>
+          <p:cNvPr id="12" name="element_7daeb11a11b3c1ee17636a78f752275f"/>
+          <p:cNvSpPr txBox="1"/>
+          <p:nvPr/>
+        </p:nvSpPr>
+        <p:spPr>
+          <a:xfrm>
+            <a:off x="6705432" y="5417820"/>
+            <a:ext cx="4267093" cy="480060"/>
+          </a:xfrm>
+          <a:prstGeom prst="rect">
+            <a:avLst/>
+          </a:prstGeom>
+          <a:noFill/>
+          <a:ln/>
+        </p:spPr>
+        <p:txBody>
+          <a:bodyPr wrap="square" lIns="0" tIns="0" rIns="0" bIns="0" rtlCol="0" anchor="t">
+            <a:normAutofit/>
+          </a:bodyPr>
+          <a:lstStyle/>
+          <a:p>
+            <a:pPr algn="ctr" indent="0" marL="0">
+              <a:lnSpc>
+                <a:spcPct val="120000"/>
+              </a:lnSpc>
+              <a:buNone/>
+            </a:pPr>
+            <a:r>
+              <a:rPr lang="en-US" sz="1400" dirty="0">
+                <a:solidFill>
+                  <a:srgbClr val="756B61"/>
+                </a:solidFill>
+                <a:latin typeface="Geist Variable" pitchFamily="34" charset="0"/>
+                <a:ea typeface="Geist Variable" pitchFamily="34" charset="-122"/>
+                <a:cs typeface="Geist Variable" pitchFamily="34" charset="-120"/>
+              </a:rPr>
+              <a:t>A canonical deck graph keeps every artifact connected.</a:t>
+            </a:r>
+            <a:endParaRPr lang="en-US" sz="1400" dirty="0"/>
+          </a:p>
+        </p:txBody>
+      </p:sp>
+      <p:sp>
+        <p:nvSpPr>
+          <p:cNvPr id="13" name="element_1a94eb22c800a9d3b58274817bbf2ee3"/>
           <p:cNvSpPr txBox="1"/>
           <p:nvPr/>
         </p:nvSpPr>
@@ -2697,7 +3178,7 @@
       </p:sp>
       <p:sp>
         <p:nvSpPr>
-          <p:cNvPr id="10" name="element_ba0cb98647b302edc5c2fb15794534d7"/>
+          <p:cNvPr id="14" name="element_1d1fb929ec1c87031012748a9395d904"/>
           <p:cNvSpPr txBox="1"/>
           <p:nvPr/>
         </p:nvSpPr>
@@ -2773,7 +3254,36 @@
       </p:grpSpPr>
       <p:sp>
         <p:nvSpPr>
-          <p:cNvPr id="2" name="element_1c1be18343a0f638d3b0588a8b7f3124"/>
+          <p:cNvPr id="2" name="nodeslide-slide-id:slide_7378cb8853f3b5a80c3fd290653a28d8"/>
+          <p:cNvSpPr/>
+          <p:nvPr/>
+        </p:nvSpPr>
+        <p:spPr>
+          <a:xfrm>
+            <a:off x="0" y="0"/>
+            <a:ext cx="914" cy="914"/>
+          </a:xfrm>
+          <a:prstGeom prst="rect">
+            <a:avLst/>
+          </a:prstGeom>
+          <a:solidFill>
+            <a:srgbClr val="FFFFFF">
+              <a:alpha val="0"/>
+            </a:srgbClr>
+          </a:solidFill>
+          <a:ln w="12700">
+            <a:solidFill>
+              <a:srgbClr val="FFFFFF">
+                <a:alpha val="0"/>
+              </a:srgbClr>
+            </a:solidFill>
+            <a:prstDash val="solid"/>
+          </a:ln>
+        </p:spPr>
+      </p:sp>
+      <p:sp>
+        <p:nvSpPr>
+          <p:cNvPr id="3" name="element_a8580d6dc9328c672e56f8695a1ba126"/>
           <p:cNvSpPr/>
           <p:nvPr/>
         </p:nvSpPr>
@@ -2800,7 +3310,7 @@
       </p:sp>
       <p:sp>
         <p:nvSpPr>
-          <p:cNvPr id="3" name="element_40f2507663d2717ac27a77f51bb1e5e4"/>
+          <p:cNvPr id="4" name="element_0656d19b150c06aa0462bac795200a16"/>
           <p:cNvSpPr txBox="1"/>
           <p:nvPr/>
         </p:nvSpPr>
@@ -2844,7 +3354,7 @@
       </p:sp>
       <p:sp>
         <p:nvSpPr>
-          <p:cNvPr id="4" name="element_66ff8fc9034013e53d12d31b8131840a"/>
+          <p:cNvPr id="5" name="element_c722e8e4c24159b9336a7ed9f283c189"/>
           <p:cNvSpPr txBox="1"/>
           <p:nvPr/>
         </p:nvSpPr>
@@ -2876,9 +3386,9 @@
                 <a:solidFill>
                   <a:srgbClr val="26221D"/>
                 </a:solidFill>
-                <a:latin typeface="Fraunces Variable" pitchFamily="34" charset="0"/>
-                <a:ea typeface="Fraunces Variable" pitchFamily="34" charset="-122"/>
-                <a:cs typeface="Fraunces Variable" pitchFamily="34" charset="-120"/>
+                <a:latin typeface="Georgia" pitchFamily="34" charset="0"/>
+                <a:ea typeface="Georgia" pitchFamily="34" charset="-122"/>
+                <a:cs typeface="Georgia" pitchFamily="34" charset="-120"/>
               </a:rPr>
               <a:t>Plan → propose → commit, with scope checked at every boundary.</a:t>
             </a:r>
@@ -2888,14 +3398,14 @@
       </p:sp>
       <p:sp>
         <p:nvSpPr>
-          <p:cNvPr id="5" name="element_e9be460b5c4f49085481a78efbc0c0f7"/>
+          <p:cNvPr id="6" name="element_33b30fa577a74f35be7364c94bb4cdbc"/>
           <p:cNvSpPr txBox="1"/>
           <p:nvPr/>
         </p:nvSpPr>
         <p:spPr>
           <a:xfrm>
             <a:off x="853419" y="2743200"/>
-            <a:ext cx="5852014" cy="1371600"/>
+            <a:ext cx="4754761" cy="1371600"/>
           </a:xfrm>
           <a:prstGeom prst="rect">
             <a:avLst/>
@@ -2932,14 +3442,14 @@
       </p:sp>
       <p:sp>
         <p:nvSpPr>
-          <p:cNvPr id="6" name="element_ad3ecacdd1c141637eb417fc6746a1ee"/>
-          <p:cNvSpPr txBox="1"/>
-          <p:nvPr/>
-        </p:nvSpPr>
-        <p:spPr>
-          <a:xfrm>
-            <a:off x="7193100" y="2880360"/>
-            <a:ext cx="4023259" cy="617220"/>
+          <p:cNvPr id="7" name="element_e9316c00eb7dae80238142b4d859b5bc"/>
+          <p:cNvSpPr txBox="1"/>
+          <p:nvPr/>
+        </p:nvSpPr>
+        <p:spPr>
+          <a:xfrm>
+            <a:off x="853419" y="4251960"/>
+            <a:ext cx="4754761" cy="617220"/>
           </a:xfrm>
           <a:prstGeom prst="rect">
             <a:avLst/>
@@ -2976,14 +3486,14 @@
       </p:sp>
       <p:sp>
         <p:nvSpPr>
-          <p:cNvPr id="7" name="element_f403681ef0f5833b7d0b7f6b55baf02f"/>
-          <p:cNvSpPr txBox="1"/>
-          <p:nvPr/>
-        </p:nvSpPr>
-        <p:spPr>
-          <a:xfrm>
-            <a:off x="7193100" y="3703320"/>
-            <a:ext cx="4023259" cy="617220"/>
+          <p:cNvPr id="8" name="element_16b50b88158499ad4c54c06e41c2fcef"/>
+          <p:cNvSpPr txBox="1"/>
+          <p:nvPr/>
+        </p:nvSpPr>
+        <p:spPr>
+          <a:xfrm>
+            <a:off x="853419" y="4937760"/>
+            <a:ext cx="4754761" cy="617220"/>
           </a:xfrm>
           <a:prstGeom prst="rect">
             <a:avLst/>
@@ -3020,14 +3530,14 @@
       </p:sp>
       <p:sp>
         <p:nvSpPr>
-          <p:cNvPr id="8" name="element_3301b22f6dfdd33fb4d9a7f1ee4379b9"/>
-          <p:cNvSpPr txBox="1"/>
-          <p:nvPr/>
-        </p:nvSpPr>
-        <p:spPr>
-          <a:xfrm>
-            <a:off x="7193100" y="4526280"/>
-            <a:ext cx="4023259" cy="617220"/>
+          <p:cNvPr id="9" name="element_f53225b5fe3b142d14843d4623d8e4c6"/>
+          <p:cNvSpPr txBox="1"/>
+          <p:nvPr/>
+        </p:nvSpPr>
+        <p:spPr>
+          <a:xfrm>
+            <a:off x="853419" y="5623560"/>
+            <a:ext cx="4754761" cy="617220"/>
           </a:xfrm>
           <a:prstGeom prst="rect">
             <a:avLst/>
@@ -3064,42 +3574,86 @@
       </p:sp>
       <p:sp>
         <p:nvSpPr>
-          <p:cNvPr id="9" name="element_19bf74ea977cba1d6ea974e5b0561610"/>
-          <p:cNvSpPr txBox="1"/>
-          <p:nvPr/>
-        </p:nvSpPr>
-        <p:spPr>
-          <a:xfrm>
-            <a:off x="853419" y="6377940"/>
-            <a:ext cx="8778021" cy="240030"/>
-          </a:xfrm>
-          <a:prstGeom prst="rect">
-            <a:avLst/>
-          </a:prstGeom>
-          <a:noFill/>
-          <a:ln/>
-        </p:spPr>
-        <p:txBody>
-          <a:bodyPr wrap="square" lIns="0" tIns="0" rIns="0" bIns="0" rtlCol="0" anchor="t">
-            <a:normAutofit/>
-          </a:bodyPr>
-          <a:lstStyle/>
-          <a:p>
-            <a:pPr algn="l" indent="0" marL="0">
-              <a:lnSpc>
-                <a:spcPct val="120000"/>
-              </a:lnSpc>
-              <a:buNone/>
-            </a:pPr>
-            <a:r>
-              <a:rPr lang="en-US" sz="1000" spc="110" kern="0" dirty="0">
-                <a:solidFill>
-                  <a:srgbClr val="756B61"/>
+          <p:cNvPr id="10" name="element_273d00d9131ca6c87106d0fb160e5255"/>
+          <p:cNvSpPr txBox="1"/>
+          <p:nvPr/>
+        </p:nvSpPr>
+        <p:spPr>
+          <a:xfrm>
+            <a:off x="6461598" y="2880360"/>
+            <a:ext cx="4754761" cy="1645920"/>
+          </a:xfrm>
+          <a:prstGeom prst="rect">
+            <a:avLst/>
+          </a:prstGeom>
+          <a:noFill/>
+          <a:ln/>
+        </p:spPr>
+        <p:txBody>
+          <a:bodyPr wrap="square" lIns="254000" tIns="254000" rIns="254000" bIns="254000" rtlCol="0" anchor="ctr">
+            <a:normAutofit/>
+          </a:bodyPr>
+          <a:lstStyle/>
+          <a:p>
+            <a:pPr algn="ctr" indent="0" marL="0">
+              <a:lnSpc>
+                <a:spcPct val="115000"/>
+              </a:lnSpc>
+              <a:buNone/>
+            </a:pPr>
+            <a:r>
+              <a:rPr lang="en-US" sz="3000" b="1" dirty="0">
+                <a:solidFill>
+                  <a:srgbClr val="34452C"/>
                 </a:solidFill>
                 <a:latin typeface="JetBrains Mono Variable" pitchFamily="34" charset="0"/>
                 <a:ea typeface="JetBrains Mono Variable" pitchFamily="34" charset="-122"/>
                 <a:cs typeface="JetBrains Mono Variable" pitchFamily="34" charset="-120"/>
               </a:rPr>
+              <a:t>authorized change = requested scope ∩ allowed scope</a:t>
+            </a:r>
+            <a:endParaRPr lang="en-US" sz="3000" dirty="0"/>
+          </a:p>
+        </p:txBody>
+      </p:sp>
+      <p:sp>
+        <p:nvSpPr>
+          <p:cNvPr id="11" name="element_476710e3250482343af08dc3ff5208de"/>
+          <p:cNvSpPr txBox="1"/>
+          <p:nvPr/>
+        </p:nvSpPr>
+        <p:spPr>
+          <a:xfrm>
+            <a:off x="853419" y="6377940"/>
+            <a:ext cx="8778021" cy="240030"/>
+          </a:xfrm>
+          <a:prstGeom prst="rect">
+            <a:avLst/>
+          </a:prstGeom>
+          <a:noFill/>
+          <a:ln/>
+        </p:spPr>
+        <p:txBody>
+          <a:bodyPr wrap="square" lIns="0" tIns="0" rIns="0" bIns="0" rtlCol="0" anchor="t">
+            <a:normAutofit/>
+          </a:bodyPr>
+          <a:lstStyle/>
+          <a:p>
+            <a:pPr algn="l" indent="0" marL="0">
+              <a:lnSpc>
+                <a:spcPct val="120000"/>
+              </a:lnSpc>
+              <a:buNone/>
+            </a:pPr>
+            <a:r>
+              <a:rPr lang="en-US" sz="1000" spc="110" kern="0" dirty="0">
+                <a:solidFill>
+                  <a:srgbClr val="756B61"/>
+                </a:solidFill>
+                <a:latin typeface="JetBrains Mono Variable" pitchFamily="34" charset="0"/>
+                <a:ea typeface="JetBrains Mono Variable" pitchFamily="34" charset="-122"/>
+                <a:cs typeface="JetBrains Mono Variable" pitchFamily="34" charset="-120"/>
+              </a:rPr>
               <a:t>NODESLIDE  ·  SOURCE-AWARE  ·  EDITABLE</a:t>
             </a:r>
             <a:endParaRPr lang="en-US" sz="1000" dirty="0"/>
@@ -3108,7 +3662,7 @@
       </p:sp>
       <p:sp>
         <p:nvSpPr>
-          <p:cNvPr id="10" name="element_2227e14e2c08b3d20ba1b2416440d3fc"/>
+          <p:cNvPr id="12" name="element_a4f2f1d806504a710b61195b3f39f048"/>
           <p:cNvSpPr txBox="1"/>
           <p:nvPr/>
         </p:nvSpPr>
@@ -3184,7 +3738,36 @@
       </p:grpSpPr>
       <p:sp>
         <p:nvSpPr>
-          <p:cNvPr id="2" name="element_6c59da1c9425b8d2937c8a23fa4538f9"/>
+          <p:cNvPr id="2" name="nodeslide-slide-id:slide_e6879f5b92b9a5a2cdf6bca80e6ca178"/>
+          <p:cNvSpPr/>
+          <p:nvPr/>
+        </p:nvSpPr>
+        <p:spPr>
+          <a:xfrm>
+            <a:off x="0" y="0"/>
+            <a:ext cx="914" cy="914"/>
+          </a:xfrm>
+          <a:prstGeom prst="rect">
+            <a:avLst/>
+          </a:prstGeom>
+          <a:solidFill>
+            <a:srgbClr val="FFFFFF">
+              <a:alpha val="0"/>
+            </a:srgbClr>
+          </a:solidFill>
+          <a:ln w="12700">
+            <a:solidFill>
+              <a:srgbClr val="FFFFFF">
+                <a:alpha val="0"/>
+              </a:srgbClr>
+            </a:solidFill>
+            <a:prstDash val="solid"/>
+          </a:ln>
+        </p:spPr>
+      </p:sp>
+      <p:sp>
+        <p:nvSpPr>
+          <p:cNvPr id="3" name="element_3744c0f4aa525cdd34921fbe03d7050d"/>
           <p:cNvSpPr/>
           <p:nvPr/>
         </p:nvSpPr>
@@ -3211,7 +3794,7 @@
       </p:sp>
       <p:sp>
         <p:nvSpPr>
-          <p:cNvPr id="3" name="element_f062dabc9bf1deb419aff68f46ea022c"/>
+          <p:cNvPr id="4" name="element_25be6cd04515e63082888ff34a5e48e7"/>
           <p:cNvSpPr txBox="1"/>
           <p:nvPr/>
         </p:nvSpPr>
@@ -3255,7 +3838,7 @@
       </p:sp>
       <p:sp>
         <p:nvSpPr>
-          <p:cNvPr id="4" name="element_9cf22a76d2c6486c863f73f6a59a1225"/>
+          <p:cNvPr id="5" name="element_82f891406c434b03c3614a9e2fb7755d"/>
           <p:cNvSpPr txBox="1"/>
           <p:nvPr/>
         </p:nvSpPr>
@@ -3287,9 +3870,9 @@
                 <a:solidFill>
                   <a:srgbClr val="26221D"/>
                 </a:solidFill>
-                <a:latin typeface="Fraunces Variable" pitchFamily="34" charset="0"/>
-                <a:ea typeface="Fraunces Variable" pitchFamily="34" charset="-122"/>
-                <a:cs typeface="Fraunces Variable" pitchFamily="34" charset="-120"/>
+                <a:latin typeface="Georgia" pitchFamily="34" charset="0"/>
+                <a:ea typeface="Georgia" pitchFamily="34" charset="-122"/>
+                <a:cs typeface="Georgia" pitchFamily="34" charset="-120"/>
               </a:rPr>
               <a:t>A beautiful deck still needs deterministic gates.</a:t>
             </a:r>
@@ -3299,7 +3882,7 @@
       </p:sp>
       <p:sp>
         <p:nvSpPr>
-          <p:cNvPr id="5" name="element_c3c93b3900b0ab2846fac09c8068db23"/>
+          <p:cNvPr id="6" name="element_d41f6c85f7bd0924a0f5c75cfaddf3ad"/>
           <p:cNvSpPr txBox="1"/>
           <p:nvPr/>
         </p:nvSpPr>
@@ -3343,7 +3926,7 @@
       </p:sp>
       <p:sp>
         <p:nvSpPr>
-          <p:cNvPr id="6" name="element_c6fdf159c7579e5e5e34bde7db2af42c"/>
+          <p:cNvPr id="7" name="element_e562008434cfab97b2c353875440777a"/>
           <p:cNvSpPr txBox="1"/>
           <p:nvPr/>
         </p:nvSpPr>
@@ -3387,13 +3970,13 @@
       </p:sp>
       <p:sp>
         <p:nvSpPr>
-          <p:cNvPr id="7" name="element_2767722c982282015c119479cc633ca0"/>
-          <p:cNvSpPr txBox="1"/>
-          <p:nvPr/>
-        </p:nvSpPr>
-        <p:spPr>
-          <a:xfrm>
-            <a:off x="853419" y="5074920"/>
+          <p:cNvPr id="8" name="element_dc37b85904618e04c22cb13012b40c62"/>
+          <p:cNvSpPr txBox="1"/>
+          <p:nvPr/>
+        </p:nvSpPr>
+        <p:spPr>
+          <a:xfrm>
+            <a:off x="853419" y="4937760"/>
             <a:ext cx="4754761" cy="617220"/>
           </a:xfrm>
           <a:prstGeom prst="rect">
@@ -3431,13 +4014,13 @@
       </p:sp>
       <p:sp>
         <p:nvSpPr>
-          <p:cNvPr id="8" name="element_ae9fff346f77b8b6b4eb92152c9dce10"/>
-          <p:cNvSpPr txBox="1"/>
-          <p:nvPr/>
-        </p:nvSpPr>
-        <p:spPr>
-          <a:xfrm>
-            <a:off x="853419" y="5897880"/>
+          <p:cNvPr id="9" name="element_ec19aaa2029b02bd2d109b9cbec0bcd3"/>
+          <p:cNvSpPr txBox="1"/>
+          <p:nvPr/>
+        </p:nvSpPr>
+        <p:spPr>
+          <a:xfrm>
+            <a:off x="853419" y="5623560"/>
             <a:ext cx="4754761" cy="617220"/>
           </a:xfrm>
           <a:prstGeom prst="rect">
@@ -3475,7 +4058,7 @@
       </p:sp>
       <p:sp>
         <p:nvSpPr>
-          <p:cNvPr id="9" name="element_718abc118afcc1683aad02b5bb2e4ed8"/>
+          <p:cNvPr id="10" name="element_a606a28bd371b47ba40d91d7c7e78fc9"/>
           <p:cNvSpPr txBox="1"/>
           <p:nvPr/>
         </p:nvSpPr>
@@ -3519,7 +4102,7 @@
       </p:sp>
       <p:sp>
         <p:nvSpPr>
-          <p:cNvPr id="10" name="element_9dae0dd68d5ea9b727b2144d18dc0224"/>
+          <p:cNvPr id="11" name="element_5a6ff4a5ecaf760c63fdcc995c4d014f"/>
           <p:cNvSpPr txBox="1"/>
           <p:nvPr/>
         </p:nvSpPr>
@@ -3561,9 +4144,25 @@
           </a:p>
         </p:txBody>
       </p:sp>
-      <p:sp>
-        <p:nvSpPr>
-          <p:cNvPr id="11" name="element_34b89ff3bb1701c41cd6ed807d1b96a0"/>
+      <p:graphicFrame>
+        <p:nvGraphicFramePr>
+          <p:cNvPr id="12" name="element_eba41f0c14faf338e8873aa648f92b92" descr=""/>
+          <p:cNvGraphicFramePr/>
+          <p:nvPr/>
+        </p:nvGraphicFramePr>
+        <p:xfrm>
+          <a:off x="6461598" y="4800600"/>
+          <a:ext cx="4754761" cy="1165860"/>
+        </p:xfrm>
+        <a:graphic xmlns:a="http://schemas.openxmlformats.org/drawingml/2006/main">
+          <a:graphicData uri="http://schemas.openxmlformats.org/drawingml/2006/chart">
+            <c:chart xmlns:c="http://schemas.openxmlformats.org/drawingml/2006/chart" r:id="rId1"/>
+          </a:graphicData>
+        </a:graphic>
+      </p:graphicFrame>
+      <p:sp>
+        <p:nvSpPr>
+          <p:cNvPr id="13" name="element_e8f0ffc9792aa91fb489f95289ed6ef4"/>
           <p:cNvSpPr txBox="1"/>
           <p:nvPr/>
         </p:nvSpPr>
@@ -3607,7 +4206,7 @@
       </p:sp>
       <p:sp>
         <p:nvSpPr>
-          <p:cNvPr id="12" name="element_a3a8636f20b8117af7d3e4ce6bb9ba45"/>
+          <p:cNvPr id="14" name="element_d7a6b95ef6ff94dff5483ee65ac98d27"/>
           <p:cNvSpPr txBox="1"/>
           <p:nvPr/>
         </p:nvSpPr>
@@ -3683,7 +4282,36 @@
       </p:grpSpPr>
       <p:sp>
         <p:nvSpPr>
-          <p:cNvPr id="2" name="element_800b2f113b338f30bd9a870c07d15a37"/>
+          <p:cNvPr id="2" name="nodeslide-slide-id:slide_5d229caec6f66e457e90bbef915a3b2a"/>
+          <p:cNvSpPr/>
+          <p:nvPr/>
+        </p:nvSpPr>
+        <p:spPr>
+          <a:xfrm>
+            <a:off x="0" y="0"/>
+            <a:ext cx="914" cy="914"/>
+          </a:xfrm>
+          <a:prstGeom prst="rect">
+            <a:avLst/>
+          </a:prstGeom>
+          <a:solidFill>
+            <a:srgbClr val="FFFFFF">
+              <a:alpha val="0"/>
+            </a:srgbClr>
+          </a:solidFill>
+          <a:ln w="12700">
+            <a:solidFill>
+              <a:srgbClr val="FFFFFF">
+                <a:alpha val="0"/>
+              </a:srgbClr>
+            </a:solidFill>
+            <a:prstDash val="solid"/>
+          </a:ln>
+        </p:spPr>
+      </p:sp>
+      <p:sp>
+        <p:nvSpPr>
+          <p:cNvPr id="3" name="element_8491c3e7d24240ae7d7bb0072d691eba"/>
           <p:cNvSpPr/>
           <p:nvPr/>
         </p:nvSpPr>
@@ -3710,7 +4338,7 @@
       </p:sp>
       <p:sp>
         <p:nvSpPr>
-          <p:cNvPr id="3" name="element_830eef9a4f57f16c5d1409477dbc2e92"/>
+          <p:cNvPr id="4" name="element_f554fc81093b95bdd15cd7da7398a7ee"/>
           <p:cNvSpPr txBox="1"/>
           <p:nvPr/>
         </p:nvSpPr>
@@ -3754,7 +4382,7 @@
       </p:sp>
       <p:sp>
         <p:nvSpPr>
-          <p:cNvPr id="4" name="element_c48d6a65b2b68554164e634a802ded7d"/>
+          <p:cNvPr id="5" name="element_266ebcd61e3edc0097e384309e1de415"/>
           <p:cNvSpPr txBox="1"/>
           <p:nvPr/>
         </p:nvSpPr>
@@ -3786,9 +4414,9 @@
                 <a:solidFill>
                   <a:srgbClr val="26221D"/>
                 </a:solidFill>
-                <a:latin typeface="Fraunces Variable" pitchFamily="34" charset="0"/>
-                <a:ea typeface="Fraunces Variable" pitchFamily="34" charset="-122"/>
-                <a:cs typeface="Fraunces Variable" pitchFamily="34" charset="-120"/>
+                <a:latin typeface="Georgia" pitchFamily="34" charset="0"/>
+                <a:ea typeface="Georgia" pitchFamily="34" charset="-122"/>
+                <a:cs typeface="Georgia" pitchFamily="34" charset="-120"/>
               </a:rPr>
               <a:t>Comments become context. Patches remain choices.</a:t>
             </a:r>
@@ -3798,14 +4426,14 @@
       </p:sp>
       <p:sp>
         <p:nvSpPr>
-          <p:cNvPr id="5" name="element_d98dd9d286f1364587c5d1525b9b723f"/>
+          <p:cNvPr id="6" name="element_aebfd3c87fb5234246ed8eaa2dc7c672"/>
           <p:cNvSpPr txBox="1"/>
           <p:nvPr/>
         </p:nvSpPr>
         <p:spPr>
           <a:xfrm>
             <a:off x="853419" y="2743200"/>
-            <a:ext cx="5852014" cy="1371600"/>
+            <a:ext cx="9631439" cy="1234440"/>
           </a:xfrm>
           <a:prstGeom prst="rect">
             <a:avLst/>
@@ -3842,14 +4470,14 @@
       </p:sp>
       <p:sp>
         <p:nvSpPr>
-          <p:cNvPr id="6" name="element_a6f5c447aa37ce6e76fe83cd0dc87938"/>
-          <p:cNvSpPr txBox="1"/>
-          <p:nvPr/>
-        </p:nvSpPr>
-        <p:spPr>
-          <a:xfrm>
-            <a:off x="7193100" y="2880360"/>
-            <a:ext cx="4023259" cy="617220"/>
+          <p:cNvPr id="7" name="element_de564ee75933cd88c9e0c226efe55649"/>
+          <p:cNvSpPr txBox="1"/>
+          <p:nvPr/>
+        </p:nvSpPr>
+        <p:spPr>
+          <a:xfrm>
+            <a:off x="853419" y="4251960"/>
+            <a:ext cx="3169841" cy="1097280"/>
           </a:xfrm>
           <a:prstGeom prst="rect">
             <a:avLst/>
@@ -3886,14 +4514,14 @@
       </p:sp>
       <p:sp>
         <p:nvSpPr>
-          <p:cNvPr id="7" name="element_344edf4cc83f40fe76c1cc569ba4ed9e"/>
-          <p:cNvSpPr txBox="1"/>
-          <p:nvPr/>
-        </p:nvSpPr>
-        <p:spPr>
-          <a:xfrm>
-            <a:off x="7193100" y="3703320"/>
-            <a:ext cx="4023259" cy="617220"/>
+          <p:cNvPr id="8" name="element_38d2741595e667cb5063c334a4217dfd"/>
+          <p:cNvSpPr txBox="1"/>
+          <p:nvPr/>
+        </p:nvSpPr>
+        <p:spPr>
+          <a:xfrm>
+            <a:off x="4389010" y="4251960"/>
+            <a:ext cx="3169841" cy="1097280"/>
           </a:xfrm>
           <a:prstGeom prst="rect">
             <a:avLst/>
@@ -3930,14 +4558,14 @@
       </p:sp>
       <p:sp>
         <p:nvSpPr>
-          <p:cNvPr id="8" name="element_f2e23a39e10c391a91aa50c8b927e6a8"/>
-          <p:cNvSpPr txBox="1"/>
-          <p:nvPr/>
-        </p:nvSpPr>
-        <p:spPr>
-          <a:xfrm>
-            <a:off x="7193100" y="4526280"/>
-            <a:ext cx="4023259" cy="617220"/>
+          <p:cNvPr id="9" name="element_11d0e6fc1a4190334487839825a514d0"/>
+          <p:cNvSpPr txBox="1"/>
+          <p:nvPr/>
+        </p:nvSpPr>
+        <p:spPr>
+          <a:xfrm>
+            <a:off x="7924602" y="4251960"/>
+            <a:ext cx="3169841" cy="1097280"/>
           </a:xfrm>
           <a:prstGeom prst="rect">
             <a:avLst/>
@@ -3974,7 +4602,7 @@
       </p:sp>
       <p:sp>
         <p:nvSpPr>
-          <p:cNvPr id="9" name="element_9a8b030e5eae68f982a55a608969958f"/>
+          <p:cNvPr id="10" name="element_3b285cacb9bbe413ae5e56cc1f811d9c"/>
           <p:cNvSpPr txBox="1"/>
           <p:nvPr/>
         </p:nvSpPr>
@@ -4018,7 +4646,7 @@
       </p:sp>
       <p:sp>
         <p:nvSpPr>
-          <p:cNvPr id="10" name="element_7c2513557ea4b3f3c2d7b0089460b10e"/>
+          <p:cNvPr id="11" name="element_7475d1ef6f5d51c06499aaf8fa11b407"/>
           <p:cNvSpPr txBox="1"/>
           <p:nvPr/>
         </p:nvSpPr>
@@ -4094,7 +4722,36 @@
       </p:grpSpPr>
       <p:sp>
         <p:nvSpPr>
-          <p:cNvPr id="2" name="element_c94d091cdc3e11e427e266892f4a4017"/>
+          <p:cNvPr id="2" name="nodeslide-slide-id:slide_d20bd3e06e7921fdae1b46c3337edc81"/>
+          <p:cNvSpPr/>
+          <p:nvPr/>
+        </p:nvSpPr>
+        <p:spPr>
+          <a:xfrm>
+            <a:off x="0" y="0"/>
+            <a:ext cx="914" cy="914"/>
+          </a:xfrm>
+          <a:prstGeom prst="rect">
+            <a:avLst/>
+          </a:prstGeom>
+          <a:solidFill>
+            <a:srgbClr val="FFFFFF">
+              <a:alpha val="0"/>
+            </a:srgbClr>
+          </a:solidFill>
+          <a:ln w="12700">
+            <a:solidFill>
+              <a:srgbClr val="FFFFFF">
+                <a:alpha val="0"/>
+              </a:srgbClr>
+            </a:solidFill>
+            <a:prstDash val="solid"/>
+          </a:ln>
+        </p:spPr>
+      </p:sp>
+      <p:sp>
+        <p:nvSpPr>
+          <p:cNvPr id="3" name="element_2939c5cef3359c82bf358902ad5d9edf"/>
           <p:cNvSpPr/>
           <p:nvPr/>
         </p:nvSpPr>
@@ -4121,7 +4778,7 @@
       </p:sp>
       <p:sp>
         <p:nvSpPr>
-          <p:cNvPr id="3" name="element_7ac643218aa6bd00285c8ac93fa3ca30"/>
+          <p:cNvPr id="4" name="element_c66d866551ade78da1e2f24ab08be412"/>
           <p:cNvSpPr txBox="1"/>
           <p:nvPr/>
         </p:nvSpPr>
@@ -4165,7 +4822,7 @@
       </p:sp>
       <p:sp>
         <p:nvSpPr>
-          <p:cNvPr id="4" name="element_b90864e07e3c485affc98c58f4b40234"/>
+          <p:cNvPr id="5" name="element_3d4e1464e3c8c109dd6d3bac4e883a17"/>
           <p:cNvSpPr txBox="1"/>
           <p:nvPr/>
         </p:nvSpPr>
@@ -4197,9 +4854,9 @@
                 <a:solidFill>
                   <a:srgbClr val="26221D"/>
                 </a:solidFill>
-                <a:latin typeface="Fraunces Variable" pitchFamily="34" charset="0"/>
-                <a:ea typeface="Fraunces Variable" pitchFamily="34" charset="-122"/>
-                <a:cs typeface="Fraunces Variable" pitchFamily="34" charset="-120"/>
+                <a:latin typeface="Georgia" pitchFamily="34" charset="0"/>
+                <a:ea typeface="Georgia" pitchFamily="34" charset="-122"/>
+                <a:cs typeface="Georgia" pitchFamily="34" charset="-120"/>
               </a:rPr>
               <a:t>Move at presentation speed without giving up engineering-grade trust.</a:t>
             </a:r>
@@ -4209,7 +4866,7 @@
       </p:sp>
       <p:sp>
         <p:nvSpPr>
-          <p:cNvPr id="5" name="element_a8e135f63583f24efd8b955ac404e63c"/>
+          <p:cNvPr id="6" name="element_257b004c78dbb29cae662bb2dda85a28"/>
           <p:cNvSpPr txBox="1"/>
           <p:nvPr/>
         </p:nvSpPr>
@@ -4253,7 +4910,7 @@
       </p:sp>
       <p:sp>
         <p:nvSpPr>
-          <p:cNvPr id="6" name="element_68a25cb60e3026ce87be8282cc5c293e"/>
+          <p:cNvPr id="7" name="element_1e451b7f09dcad9b11292ee0169c7009"/>
           <p:cNvSpPr txBox="1"/>
           <p:nvPr/>
         </p:nvSpPr>
@@ -4297,7 +4954,7 @@
       </p:sp>
       <p:sp>
         <p:nvSpPr>
-          <p:cNvPr id="7" name="element_1e31cfa434cc9a946f89b7cc06710c96"/>
+          <p:cNvPr id="8" name="element_e8e5f4a5b006c02063c98ed3ea6b87ad"/>
           <p:cNvSpPr txBox="1"/>
           <p:nvPr/>
         </p:nvSpPr>
@@ -4341,7 +4998,7 @@
       </p:sp>
       <p:sp>
         <p:nvSpPr>
-          <p:cNvPr id="8" name="element_2889b1f64385cb62dcba74677cf33e2c"/>
+          <p:cNvPr id="9" name="element_a3a3295ca708ee0fae856b12126c836e"/>
           <p:cNvSpPr txBox="1"/>
           <p:nvPr/>
         </p:nvSpPr>
@@ -4385,7 +5042,7 @@
       </p:sp>
       <p:sp>
         <p:nvSpPr>
-          <p:cNvPr id="9" name="element_24b34ae693595a9403db115430298cd4"/>
+          <p:cNvPr id="10" name="element_3d2626824b2c865994a9b2dc900357ad"/>
           <p:cNvSpPr txBox="1"/>
           <p:nvPr/>
         </p:nvSpPr>
@@ -4429,7 +5086,7 @@
       </p:sp>
       <p:sp>
         <p:nvSpPr>
-          <p:cNvPr id="10" name="element_1e0d799f00077c09182d90dda0d43f00"/>
+          <p:cNvPr id="11" name="element_bcdca2e6a9b2ed5b86d9a97c536aa872"/>
           <p:cNvSpPr txBox="1"/>
           <p:nvPr/>
         </p:nvSpPr>
@@ -4522,7 +5179,7 @@
     </a:clrScheme>
     <a:fontScheme name="Office">
       <a:majorFont>
-        <a:latin typeface="Fraunces Variable"/>
+        <a:latin typeface="Georgia"/>
         <a:ea typeface=""/>
         <a:cs typeface=""/>
         <a:font script="Jpan" typeface="游ゴシック Light"/>
